--- a/artifacts/speaking-portfolio-expanded/decks/benchmarks-40min-handout.pptx
+++ b/artifacts/speaking-portfolio-expanded/decks/benchmarks-40min-handout.pptx
@@ -178,7 +178,7 @@
                 <a:ea typeface="Arial"/>
                 <a:cs typeface="Arial"/>
               </a:rPr>
-              <a:t xml:space="preserve">Twenty green cases. About one in seven.</a:t>
+              <a:t xml:space="preserve">Twenty for Twenty, One in Seven</a:t>
             </a:r>
             <a:endParaRPr lang="en-US" sz="1200"/>
           </a:p>
@@ -270,7 +270,7 @@
                 <a:ea typeface="Arial"/>
                 <a:cs typeface="Arial"/>
               </a:rPr>
-              <a:t xml:space="preserve">![Twenty green cases. About one in seven.](../../reveal-talks/assets/benchmarks/bound.svg)</a:t>
+              <a:t xml:space="preserve">![Twenty for Twenty, One in Seven](../../reveal-talks/assets/benchmarks/bound.svg)</a:t>
             </a:r>
             <a:endParaRPr lang="en-US" sz="1200"/>
           </a:p>
@@ -728,7 +728,7 @@
                 <a:ea typeface="Arial"/>
                 <a:cs typeface="Arial"/>
               </a:rPr>
-              <a:t xml:space="preserve">Your grader is an instrument too</a:t>
+              <a:t xml:space="preserve">Agreeable to a Fault (κ = 0)</a:t>
             </a:r>
             <a:endParaRPr lang="en-US" sz="1200"/>
           </a:p>
@@ -1073,7 +1073,7 @@
                 <a:ea typeface="Arial"/>
                 <a:cs typeface="Arial"/>
               </a:rPr>
-              <a:t xml:space="preserve">Source: Cohen (1960), [A Coefficient of Agreement for Nominal Scales](https://journals.sagepub.com/doi/abs/10.1177/001316446002000104). Feinstein and Cicchetti (1990), [High agreement but low kappa](https://pubmed.ncbi.nlm.nih.gov/2348207/). [Position bias study](https://arxiv.org/abs/2406.07791); [Self-Preference Bias in LLM-as-a-Judge](https://arxiv.org/abs/2410.21819).</a:t>
+              <a:t xml:space="preserve">Source: Cohen (1960), [A Coefficient of Agreement for Nominal Scales](https://journals.sagepub.com/doi/abs/10.1177/001316446002000104). Feinstein and Cicchetti (1990), [High agreement but low kappa](https://pubmed.ncbi.nlm.nih.gov/2348207/). Shi et al. (2024), [Judging the Judges: position bias in pairwise LLM comparisons](https://arxiv.org/abs/2406.07791). Wataoka et al. (2024), [Self-Preference Bias in LLM-as-a-Judge](https://arxiv.org/abs/2410.21819).</a:t>
             </a:r>
             <a:endParaRPr lang="en-US" sz="1200"/>
           </a:p>
@@ -1598,7 +1598,7 @@
                 <a:ea typeface="Arial"/>
                 <a:cs typeface="Arial"/>
               </a:rPr>
-              <a:t xml:space="preserve">Contamination and the reusable holdout</a:t>
+              <a:t xml:space="preserve">holdout.json Is Not Held Out</a:t>
             </a:r>
             <a:endParaRPr lang="en-US" sz="1200"/>
           </a:p>
@@ -2376,7 +2376,7 @@
                 <a:ea typeface="Arial"/>
                 <a:cs typeface="Arial"/>
               </a:rPr>
-              <a:t xml:space="preserve">Use the cheapest check that can honestly fail</a:t>
+              <a:t xml:space="preserve">The Cheapest Honest No</a:t>
             </a:r>
             <a:endParaRPr lang="en-US" sz="1200"/>
           </a:p>
@@ -2742,7 +2742,7 @@
                 <a:ea typeface="Arial"/>
                 <a:cs typeface="Arial"/>
               </a:rPr>
-              <a:t xml:space="preserve">Make it a release gate</a:t>
+              <a:t xml:space="preserve">Write the Rejection Rule First</a:t>
             </a:r>
             <a:endParaRPr lang="en-US" sz="1200"/>
           </a:p>
@@ -3407,7 +3407,53 @@
                 <a:ea typeface="Arial"/>
                 <a:cs typeface="Arial"/>
               </a:rPr>
-              <a:t xml:space="preserve">The suite is an instrument. Test the instrument. Then use it to make a decision.</a:t>
+              <a:t xml:space="preserve">The suite is an instrument. Test the instrument.</a:t>
+            </a:r>
+            <a:endParaRPr lang="en-US" sz="1200"/>
+          </a:p>
+          <a:p>
+            <a:pPr marL="0" indent="0">
+              <a:lnSpc>
+                <a:spcPts val="1560"/>
+              </a:lnSpc>
+              <a:spcAft>
+                <a:spcPts val="0"/>
+              </a:spcAft>
+              <a:buNone/>
+            </a:pPr>
+            <a:r>
+              <a:rPr lang="en-US" sz="1200" b="0">
+                <a:solidFill>
+                  <a:srgbClr val="202b33"/>
+                </a:solidFill>
+                <a:latin typeface="Arial"/>
+                <a:ea typeface="Arial"/>
+                <a:cs typeface="Arial"/>
+              </a:rPr>
+              <a:t xml:space="preserve"/>
+            </a:r>
+            <a:endParaRPr lang="en-US" sz="1200"/>
+          </a:p>
+          <a:p>
+            <a:pPr marL="0" indent="0">
+              <a:lnSpc>
+                <a:spcPts val="1560"/>
+              </a:lnSpc>
+              <a:spcAft>
+                <a:spcPts val="0"/>
+              </a:spcAft>
+              <a:buNone/>
+            </a:pPr>
+            <a:r>
+              <a:rPr lang="en-US" sz="1200" b="0">
+                <a:solidFill>
+                  <a:srgbClr val="202b33"/>
+                </a:solidFill>
+                <a:latin typeface="Arial"/>
+                <a:ea typeface="Arial"/>
+                <a:cs typeface="Arial"/>
+              </a:rPr>
+              <a:t xml:space="preserve">Stage direction: Stop talking.</a:t>
             </a:r>
             <a:endParaRPr lang="en-US" sz="1200"/>
           </a:p>
@@ -3497,7 +3543,7 @@
                 <a:ea typeface="Arial"/>
                 <a:cs typeface="Arial"/>
               </a:rPr>
-              <a:t xml:space="preserve">Campbell (1979), [Assessing the impact of planned social change](https://doi.org/10.1016/0149-7189%2879%2990048-X). Strathern (1997), [Improving ratings](https://gwern.net/doc/statistics/decision/1997-strathern.pdf), European Review 5(3), 305–321. Formulations above are paraphrases.</a:t>
+              <a:t xml:space="preserve">Goodhart (1975), Problems of Monetary Management: The U.K. Experience, Reserve Bank of Australia conference paper (reprinted 1981). Campbell (1979), [Assessing the impact of planned social change](https://doi.org/10.1016/0149-7189%2879%2990048-X). Strathern (1997), [Improving ratings](https://gwern.net/doc/statistics/decision/1997-strathern.pdf), European Review 5(3), 305–321. Formulations above are attributed paraphrases, not claims that every optimized benchmark has stopped measuring anything.</a:t>
             </a:r>
             <a:endParaRPr lang="en-US" sz="1200"/>
           </a:p>
@@ -3589,7 +3635,7 @@
                 <a:ea typeface="Arial"/>
                 <a:cs typeface="Arial"/>
               </a:rPr>
-              <a:t xml:space="preserve">Dan Levy, [Auto-Tune Your LLM Judge](https://danlevy.net/auto-tune-your-llm-judge/), supplied article. The sequence is reused as a teaching fixture, not a fresh measurement.</a:t>
+              <a:t xml:space="preserve">Dan Levy, [Auto-Tune Your LLM Judge](https://danlevy.net/auto-tune-your-llm-judge/), danlevy.net, 11 August 2026. The sequence is reused as a teaching fixture, not a fresh measurement.</a:t>
             </a:r>
             <a:endParaRPr lang="en-US" sz="1200"/>
           </a:p>
@@ -3681,7 +3727,7 @@
                 <a:ea typeface="Arial"/>
                 <a:cs typeface="Arial"/>
               </a:rPr>
-              <a:t xml:space="preserve">Cohen (1960), [A Coefficient of Agreement for Nominal Scales](https://journals.sagepub.com/doi/abs/10.1177/001316446002000104). Feinstein and Cicchetti (1990), [High agreement but low kappa](https://pubmed.ncbi.nlm.nih.gov/2348207/). [Position bias study](https://arxiv.org/abs/2406.07791); [Self-Preference Bias in LLM-as-a-Judge](https://arxiv.org/abs/2410.21819).</a:t>
+              <a:t xml:space="preserve">Cohen (1960), [A Coefficient of Agreement for Nominal Scales](https://journals.sagepub.com/doi/abs/10.1177/001316446002000104). Feinstein and Cicchetti (1990), [High agreement but low kappa](https://pubmed.ncbi.nlm.nih.gov/2348207/). Shi et al. (2024), [Judging the Judges: position bias in pairwise LLM comparisons](https://arxiv.org/abs/2406.07791). Wataoka et al. (2024), [Self-Preference Bias in LLM-as-a-Judge](https://arxiv.org/abs/2410.21819).</a:t>
             </a:r>
             <a:endParaRPr lang="en-US" sz="1200"/>
           </a:p>
@@ -3840,7 +3886,7 @@
                 <a:ea typeface="Arial"/>
                 <a:cs typeface="Arial"/>
               </a:rPr>
-              <a:t xml:space="preserve">Campbell (1979), [Assessing the impact of planned social change](https://doi.org/10.1016/0149-7189%2879%2990048-X). Strathern (1997), [Improving ratings](https://gwern.net/doc/statistics/decision/1997-strathern.pdf), European Review 5(3), 305–321. Formulations above are paraphrases.</a:t>
+              <a:t xml:space="preserve">Goodhart (1975), Problems of Monetary Management: The U.K. Experience, Reserve Bank of Australia conference paper (reprinted 1981). Campbell (1979), [Assessing the impact of planned social change](https://doi.org/10.1016/0149-7189%2879%2990048-X). Strathern (1997), [Improving ratings](https://gwern.net/doc/statistics/decision/1997-strathern.pdf), European Review 5(3), 305–321. Formulations above are attributed paraphrases, not claims that every optimized benchmark has stopped measuring anything.</a:t>
             </a:r>
             <a:endParaRPr lang="en-US" sz="1200"/>
           </a:p>
@@ -3932,7 +3978,7 @@
                 <a:ea typeface="Arial"/>
                 <a:cs typeface="Arial"/>
               </a:rPr>
-              <a:t xml:space="preserve">Dan Levy, [Auto-Tune Your LLM Judge](https://danlevy.net/auto-tune-your-llm-judge/), supplied article. The sequence is reused as a teaching fixture, not a fresh measurement.</a:t>
+              <a:t xml:space="preserve">Dan Levy, [Auto-Tune Your LLM Judge](https://danlevy.net/auto-tune-your-llm-judge/), danlevy.net, 11 August 2026. The sequence is reused as a teaching fixture, not a fresh measurement.</a:t>
             </a:r>
             <a:endParaRPr lang="en-US" sz="1200"/>
           </a:p>
@@ -4024,7 +4070,7 @@
                 <a:ea typeface="Arial"/>
                 <a:cs typeface="Arial"/>
               </a:rPr>
-              <a:t xml:space="preserve">Cohen (1960), [A Coefficient of Agreement for Nominal Scales](https://journals.sagepub.com/doi/abs/10.1177/001316446002000104). Feinstein and Cicchetti (1990), [High agreement but low kappa](https://pubmed.ncbi.nlm.nih.gov/2348207/). [Position bias study](https://arxiv.org/abs/2406.07791); [Self-Preference Bias in LLM-as-a-Judge](https://arxiv.org/abs/2410.21819).</a:t>
+              <a:t xml:space="preserve">Cohen (1960), [A Coefficient of Agreement for Nominal Scales](https://journals.sagepub.com/doi/abs/10.1177/001316446002000104). Feinstein and Cicchetti (1990), [High agreement but low kappa](https://pubmed.ncbi.nlm.nih.gov/2348207/). Shi et al. (2024), [Judging the Judges: position bias in pairwise LLM comparisons](https://arxiv.org/abs/2406.07791). Wataoka et al. (2024), [Self-Preference Bias in LLM-as-a-Judge](https://arxiv.org/abs/2410.21819).</a:t>
             </a:r>
             <a:endParaRPr lang="en-US" sz="1200"/>
           </a:p>
@@ -4183,7 +4229,7 @@
                 <a:ea typeface="Arial"/>
                 <a:cs typeface="Arial"/>
               </a:rPr>
-              <a:t xml:space="preserve">A leaderboard, and the question it isn't answering</a:t>
+              <a:t xml:space="preserve">Tuxedo of Benchmarks</a:t>
             </a:r>
             <a:endParaRPr lang="en-US" sz="1200"/>
           </a:p>
@@ -4894,7 +4940,7 @@
                 <a:ea typeface="Arial"/>
                 <a:cs typeface="Arial"/>
               </a:rPr>
-              <a:t xml:space="preserve">Prices can help choose among acceptable systems. They cannot tell us which systems are acceptable. The cost-per-success arithmetic belongs to Cry Me a Free Tier. Today the question is whether this score means anything.</a:t>
+              <a:t xml:space="preserve">Prices can help choose among acceptable systems. They cannot tell us which systems are acceptable. The cost-per-success arithmetic belongs to Buy Me a Free Tier. Today the question is whether this score means anything.</a:t>
             </a:r>
             <a:endParaRPr lang="en-US" sz="1200"/>
           </a:p>
@@ -5306,7 +5352,7 @@
                 <a:ea typeface="Arial"/>
                 <a:cs typeface="Arial"/>
               </a:rPr>
-              <a:t xml:space="preserve">Source: Campbell (1979), [Assessing the impact of planned social change](https://doi.org/10.1016/0149-7189%2879%2990048-X). Strathern (1997), [Improving ratings](https://gwern.net/doc/statistics/decision/1997-strathern.pdf), European Review 5(3), 305–321. Formulations above are paraphrases.</a:t>
+              <a:t xml:space="preserve">Source: Goodhart (1975), Problems of Monetary Management: The U.K. Experience, Reserve Bank of Australia conference paper (reprinted 1981). Campbell (1979), [Assessing the impact of planned social change](https://doi.org/10.1016/0149-7189%2879%2990048-X). Strathern (1997), [Improving ratings](https://gwern.net/doc/statistics/decision/1997-strathern.pdf), European Review 5(3), 305–321. Formulations above are attributed paraphrases, not claims that every optimized benchmark has stopped measuring anything.</a:t>
             </a:r>
             <a:endParaRPr lang="en-US" sz="1200"/>
           </a:p>
@@ -5419,7 +5465,7 @@
                 <a:ea typeface="Arial"/>
                 <a:cs typeface="Arial"/>
               </a:rPr>
-              <a:t xml:space="preserve">Your eval suite is a measuring instrument</a:t>
+              <a:t xml:space="preserve">Your Eval Suite Needs Therapy</a:t>
             </a:r>
             <a:endParaRPr lang="en-US" sz="1200"/>
           </a:p>
@@ -6655,7 +6701,7 @@
                 <a:ea typeface="Arial"/>
                 <a:cs typeface="Arial"/>
               </a:rPr>
-              <a:t xml:space="preserve">Run it five times</a:t>
+              <a:t xml:space="preserve">Run the Judges</a:t>
             </a:r>
             <a:endParaRPr lang="en-US" sz="1200"/>
           </a:p>
@@ -7023,7 +7069,7 @@
                 <a:ea typeface="Arial"/>
                 <a:cs typeface="Arial"/>
               </a:rPr>
-              <a:t xml:space="preserve">Source: Dan Levy, [Auto-Tune Your LLM Judge](https://danlevy.net/auto-tune-your-llm-judge/), supplied article. The sequence is reused as a teaching fixture, not a fresh measurement.</a:t>
+              <a:t xml:space="preserve">Source: Dan Levy, [Auto-Tune Your LLM Judge](https://danlevy.net/auto-tune-your-llm-judge/), danlevy.net, 11 August 2026. The sequence is reused as a teaching fixture, not a fresh measurement.</a:t>
             </a:r>
             <a:endParaRPr lang="en-US" sz="1200"/>
           </a:p>
@@ -7136,7 +7182,7 @@
                 <a:ea typeface="Arial"/>
                 <a:cs typeface="Arial"/>
               </a:rPr>
-              <a:t xml:space="preserve">Twenty green cases. About one in seven.</a:t>
+              <a:t xml:space="preserve">Twenty for Twenty, One in Seven</a:t>
             </a:r>
             <a:endParaRPr lang="en-US" sz="1200"/>
           </a:p>
@@ -7228,7 +7274,7 @@
                 <a:ea typeface="Arial"/>
                 <a:cs typeface="Arial"/>
               </a:rPr>
-              <a:t xml:space="preserve">![Twenty green cases. About one in seven.](../../reveal-talks/assets/benchmarks/bound.svg)</a:t>
+              <a:t xml:space="preserve">![Twenty for Twenty, One in Seven](../../reveal-talks/assets/benchmarks/bound.svg)</a:t>
             </a:r>
             <a:endParaRPr lang="en-US" sz="1200"/>
           </a:p>
@@ -8179,7 +8225,7 @@
                 <a:ea typeface="Arial"/>
                 <a:cs typeface="Arial"/>
               </a:rPr>
-              <a:t xml:space="preserve">Twenty green cases. About one in seven. (continued)</a:t>
+              <a:t xml:space="preserve">Twenty for Twenty, One in Seven (continued)</a:t>
             </a:r>
             <a:endParaRPr lang="en-US" sz="2550"/>
           </a:p>
@@ -8552,7 +8598,7 @@
                 <a:ea typeface="Arial"/>
                 <a:cs typeface="Arial"/>
               </a:rPr>
-              <a:t xml:space="preserve">Your grader is an instrument too</a:t>
+              <a:t xml:space="preserve">Agreeable to a Fault (κ = 0)</a:t>
             </a:r>
             <a:endParaRPr lang="en-US" sz="2550"/>
           </a:p>
@@ -10356,7 +10402,7 @@
                 <a:ea typeface="Arial"/>
                 <a:cs typeface="Arial"/>
               </a:rPr>
-              <a:t xml:space="preserve">Contamination and the reusable holdout</a:t>
+              <a:t xml:space="preserve">holdout.json Is Not Held Out</a:t>
             </a:r>
             <a:endParaRPr lang="en-US" sz="2550"/>
           </a:p>
@@ -12091,7 +12137,7 @@
                 <a:ea typeface="Arial"/>
                 <a:cs typeface="Arial"/>
               </a:rPr>
-              <a:t xml:space="preserve">Use the cheapest check that can honestly fail</a:t>
+              <a:t xml:space="preserve">The Cheapest Honest No</a:t>
             </a:r>
             <a:endParaRPr lang="en-US" sz="2550"/>
           </a:p>
@@ -12855,7 +12901,7 @@
                 <a:ea typeface="Arial"/>
                 <a:cs typeface="Arial"/>
               </a:rPr>
-              <a:t xml:space="preserve">Make it a release gate</a:t>
+              <a:t xml:space="preserve">Write the Rejection Rule First</a:t>
             </a:r>
             <a:endParaRPr lang="en-US" sz="2550"/>
           </a:p>
@@ -14292,7 +14338,7 @@
                 <a:ea typeface="Arial"/>
                 <a:cs typeface="Arial"/>
               </a:rPr>
-              <a:t xml:space="preserve">instrument. Then use it to make a decision.</a:t>
+              <a:t xml:space="preserve">instrument.</a:t>
             </a:r>
             <a:endParaRPr lang="en-US" sz="1500"/>
           </a:p>
@@ -14570,30 +14616,122 @@
                 <a:ea typeface="Arial"/>
                 <a:cs typeface="Arial"/>
               </a:rPr>
-              <a:t xml:space="preserve">Campbell (1979), Assessing the impact of</a:t>
-            </a:r>
-            <a:endParaRPr lang="en-US" sz="1500"/>
-          </a:p>
-          <a:p>
-            <a:pPr marL="0" indent="0">
-              <a:lnSpc>
-                <a:spcPts val="1950"/>
-              </a:lnSpc>
-              <a:spcAft>
-                <a:spcPts val="0"/>
-              </a:spcAft>
-              <a:buNone/>
-            </a:pPr>
-            <a:r>
-              <a:rPr lang="en-US" sz="1500" b="0">
-                <a:solidFill>
-                  <a:srgbClr val="202B33"/>
-                </a:solidFill>
-                <a:latin typeface="Arial"/>
-                <a:ea typeface="Arial"/>
-                <a:cs typeface="Arial"/>
-              </a:rPr>
-              <a:t xml:space="preserve">planned social change —</a:t>
+              <a:t xml:space="preserve">Goodhart (1975), Problems of Monetary</a:t>
+            </a:r>
+            <a:endParaRPr lang="en-US" sz="1500"/>
+          </a:p>
+          <a:p>
+            <a:pPr marL="0" indent="0">
+              <a:lnSpc>
+                <a:spcPts val="1950"/>
+              </a:lnSpc>
+              <a:spcAft>
+                <a:spcPts val="0"/>
+              </a:spcAft>
+              <a:buNone/>
+            </a:pPr>
+            <a:r>
+              <a:rPr lang="en-US" sz="1500" b="0">
+                <a:solidFill>
+                  <a:srgbClr val="202B33"/>
+                </a:solidFill>
+                <a:latin typeface="Arial"/>
+                <a:ea typeface="Arial"/>
+                <a:cs typeface="Arial"/>
+              </a:rPr>
+              <a:t xml:space="preserve">Management: The U.K. Experience, Reserve</a:t>
+            </a:r>
+            <a:endParaRPr lang="en-US" sz="1500"/>
+          </a:p>
+          <a:p>
+            <a:pPr marL="0" indent="0">
+              <a:lnSpc>
+                <a:spcPts val="1950"/>
+              </a:lnSpc>
+              <a:spcAft>
+                <a:spcPts val="0"/>
+              </a:spcAft>
+              <a:buNone/>
+            </a:pPr>
+            <a:r>
+              <a:rPr lang="en-US" sz="1500" b="0">
+                <a:solidFill>
+                  <a:srgbClr val="202B33"/>
+                </a:solidFill>
+                <a:latin typeface="Arial"/>
+                <a:ea typeface="Arial"/>
+                <a:cs typeface="Arial"/>
+              </a:rPr>
+              <a:t xml:space="preserve">Bank of Australia conference paper</a:t>
+            </a:r>
+            <a:endParaRPr lang="en-US" sz="1500"/>
+          </a:p>
+          <a:p>
+            <a:pPr marL="0" indent="0">
+              <a:lnSpc>
+                <a:spcPts val="1950"/>
+              </a:lnSpc>
+              <a:spcAft>
+                <a:spcPts val="0"/>
+              </a:spcAft>
+              <a:buNone/>
+            </a:pPr>
+            <a:r>
+              <a:rPr lang="en-US" sz="1500" b="0">
+                <a:solidFill>
+                  <a:srgbClr val="202B33"/>
+                </a:solidFill>
+                <a:latin typeface="Arial"/>
+                <a:ea typeface="Arial"/>
+                <a:cs typeface="Arial"/>
+              </a:rPr>
+              <a:t xml:space="preserve">(reprinted 1981). Campbell (1979),</a:t>
+            </a:r>
+            <a:endParaRPr lang="en-US" sz="1500"/>
+          </a:p>
+          <a:p>
+            <a:pPr marL="0" indent="0">
+              <a:lnSpc>
+                <a:spcPts val="1950"/>
+              </a:lnSpc>
+              <a:spcAft>
+                <a:spcPts val="0"/>
+              </a:spcAft>
+              <a:buNone/>
+            </a:pPr>
+            <a:r>
+              <a:rPr lang="en-US" sz="1500" b="0">
+                <a:solidFill>
+                  <a:srgbClr val="202B33"/>
+                </a:solidFill>
+                <a:latin typeface="Arial"/>
+                <a:ea typeface="Arial"/>
+                <a:cs typeface="Arial"/>
+              </a:rPr>
+              <a:t xml:space="preserve">Assessing the impact of planned social</a:t>
+            </a:r>
+            <a:endParaRPr lang="en-US" sz="1500"/>
+          </a:p>
+          <a:p>
+            <a:pPr marL="0" indent="0">
+              <a:lnSpc>
+                <a:spcPts val="1950"/>
+              </a:lnSpc>
+              <a:spcAft>
+                <a:spcPts val="0"/>
+              </a:spcAft>
+              <a:buNone/>
+            </a:pPr>
+            <a:r>
+              <a:rPr lang="en-US" sz="1500" b="0">
+                <a:solidFill>
+                  <a:srgbClr val="202B33"/>
+                </a:solidFill>
+                <a:latin typeface="Arial"/>
+                <a:ea typeface="Arial"/>
+                <a:cs typeface="Arial"/>
+              </a:rPr>
+              <a:t xml:space="preserve">change —</a:t>
             </a:r>
             <a:endParaRPr lang="en-US" sz="1500"/>
           </a:p>
@@ -14708,7 +14846,53 @@
                 <a:ea typeface="Arial"/>
                 <a:cs typeface="Arial"/>
               </a:rPr>
-              <a:t xml:space="preserve">above are paraphrases.</a:t>
+              <a:t xml:space="preserve">above are attributed paraphrases, not</a:t>
+            </a:r>
+            <a:endParaRPr lang="en-US" sz="1500"/>
+          </a:p>
+          <a:p>
+            <a:pPr marL="0" indent="0">
+              <a:lnSpc>
+                <a:spcPts val="1950"/>
+              </a:lnSpc>
+              <a:spcAft>
+                <a:spcPts val="0"/>
+              </a:spcAft>
+              <a:buNone/>
+            </a:pPr>
+            <a:r>
+              <a:rPr lang="en-US" sz="1500" b="0">
+                <a:solidFill>
+                  <a:srgbClr val="202B33"/>
+                </a:solidFill>
+                <a:latin typeface="Arial"/>
+                <a:ea typeface="Arial"/>
+                <a:cs typeface="Arial"/>
+              </a:rPr>
+              <a:t xml:space="preserve">claims that every optimized benchmark has</a:t>
+            </a:r>
+            <a:endParaRPr lang="en-US" sz="1500"/>
+          </a:p>
+          <a:p>
+            <a:pPr marL="0" indent="0">
+              <a:lnSpc>
+                <a:spcPts val="1950"/>
+              </a:lnSpc>
+              <a:spcAft>
+                <a:spcPts val="0"/>
+              </a:spcAft>
+              <a:buNone/>
+            </a:pPr>
+            <a:r>
+              <a:rPr lang="en-US" sz="1500" b="0">
+                <a:solidFill>
+                  <a:srgbClr val="202B33"/>
+                </a:solidFill>
+                <a:latin typeface="Arial"/>
+                <a:ea typeface="Arial"/>
+                <a:cs typeface="Arial"/>
+              </a:rPr>
+              <a:t xml:space="preserve">stopped measuring anything.</a:t>
             </a:r>
             <a:endParaRPr lang="en-US" sz="1500"/>
           </a:p>
@@ -14847,75 +15031,6 @@
                 <a:cs typeface="Arial"/>
               </a:rPr>
               <a:t xml:space="preserve">Interpretation and</a:t>
-            </a:r>
-            <a:endParaRPr lang="en-US" sz="1500"/>
-          </a:p>
-          <a:p>
-            <a:pPr marL="0" indent="0">
-              <a:lnSpc>
-                <a:spcPts val="1950"/>
-              </a:lnSpc>
-              <a:spcAft>
-                <a:spcPts val="0"/>
-              </a:spcAft>
-              <a:buNone/>
-            </a:pPr>
-            <a:r>
-              <a:rPr lang="en-US" sz="1500" b="0">
-                <a:solidFill>
-                  <a:srgbClr val="202B33"/>
-                </a:solidFill>
-                <a:latin typeface="Arial"/>
-                <a:ea typeface="Arial"/>
-                <a:cs typeface="Arial"/>
-              </a:rPr>
-              <a:t xml:space="preserve">Use](https://www.ets.org/research/policy_research_reports/publications/report/1990/ihmy.html).</a:t>
-            </a:r>
-            <a:endParaRPr lang="en-US" sz="1500"/>
-          </a:p>
-          <a:p>
-            <a:pPr marL="0" indent="0">
-              <a:lnSpc>
-                <a:spcPts val="1950"/>
-              </a:lnSpc>
-              <a:spcAft>
-                <a:spcPts val="0"/>
-              </a:spcAft>
-              <a:buNone/>
-            </a:pPr>
-            <a:r>
-              <a:rPr lang="en-US" sz="1500" b="0">
-                <a:solidFill>
-                  <a:srgbClr val="202B33"/>
-                </a:solidFill>
-                <a:latin typeface="Arial"/>
-                <a:ea typeface="Arial"/>
-                <a:cs typeface="Arial"/>
-              </a:rPr>
-              <a:t xml:space="preserve">Raji et al. (2021), [AI and the Everything</a:t>
-            </a:r>
-            <a:endParaRPr lang="en-US" sz="1500"/>
-          </a:p>
-          <a:p>
-            <a:pPr marL="0" indent="0">
-              <a:lnSpc>
-                <a:spcPts val="1950"/>
-              </a:lnSpc>
-              <a:spcAft>
-                <a:spcPts val="0"/>
-              </a:spcAft>
-              <a:buNone/>
-            </a:pPr>
-            <a:r>
-              <a:rPr lang="en-US" sz="1500" b="0">
-                <a:solidFill>
-                  <a:srgbClr val="202B33"/>
-                </a:solidFill>
-                <a:latin typeface="Arial"/>
-                <a:ea typeface="Arial"/>
-                <a:cs typeface="Arial"/>
-              </a:rPr>
-              <a:t xml:space="preserve">in the Whole Wide World</a:t>
             </a:r>
             <a:endParaRPr lang="en-US" sz="1500"/>
           </a:p>
@@ -14964,6 +15079,75 @@
                 <a:ea typeface="Arial"/>
                 <a:cs typeface="Arial"/>
               </a:rPr>
+              <a:t xml:space="preserve">Use](https://www.ets.org/research/policy_research_reports/publications/report/1990/ihmy.html).</a:t>
+            </a:r>
+            <a:endParaRPr lang="en-US" sz="1500"/>
+          </a:p>
+          <a:p>
+            <a:pPr marL="0" indent="0">
+              <a:lnSpc>
+                <a:spcPts val="1950"/>
+              </a:lnSpc>
+              <a:spcAft>
+                <a:spcPts val="0"/>
+              </a:spcAft>
+              <a:buNone/>
+            </a:pPr>
+            <a:r>
+              <a:rPr lang="en-US" sz="1500" b="0">
+                <a:solidFill>
+                  <a:srgbClr val="202B33"/>
+                </a:solidFill>
+                <a:latin typeface="Arial"/>
+                <a:ea typeface="Arial"/>
+                <a:cs typeface="Arial"/>
+              </a:rPr>
+              <a:t xml:space="preserve">Raji et al. (2021), [AI and the Everything</a:t>
+            </a:r>
+            <a:endParaRPr lang="en-US" sz="1500"/>
+          </a:p>
+          <a:p>
+            <a:pPr marL="0" indent="0">
+              <a:lnSpc>
+                <a:spcPts val="1950"/>
+              </a:lnSpc>
+              <a:spcAft>
+                <a:spcPts val="0"/>
+              </a:spcAft>
+              <a:buNone/>
+            </a:pPr>
+            <a:r>
+              <a:rPr lang="en-US" sz="1500" b="0">
+                <a:solidFill>
+                  <a:srgbClr val="202B33"/>
+                </a:solidFill>
+                <a:latin typeface="Arial"/>
+                <a:ea typeface="Arial"/>
+                <a:cs typeface="Arial"/>
+              </a:rPr>
+              <a:t xml:space="preserve">in the Whole Wide World</a:t>
+            </a:r>
+            <a:endParaRPr lang="en-US" sz="1500"/>
+          </a:p>
+          <a:p>
+            <a:pPr marL="0" indent="0">
+              <a:lnSpc>
+                <a:spcPts val="1950"/>
+              </a:lnSpc>
+              <a:spcAft>
+                <a:spcPts val="0"/>
+              </a:spcAft>
+              <a:buNone/>
+            </a:pPr>
+            <a:r>
+              <a:rPr lang="en-US" sz="1500" b="0">
+                <a:solidFill>
+                  <a:srgbClr val="202B33"/>
+                </a:solidFill>
+                <a:latin typeface="Arial"/>
+                <a:ea typeface="Arial"/>
+                <a:cs typeface="Arial"/>
+              </a:rPr>
               <a:t xml:space="preserve">Benchmark](https://datasets-benchmarks-proceedings.neurips.cc/paper/2021/hash/084b6fbb10729ed4da8c3d3f5a3ae7c9-Abstract-round2.html.</a:t>
             </a:r>
             <a:endParaRPr lang="en-US" sz="1500"/>
@@ -15056,53 +15240,53 @@
                 <a:ea typeface="Arial"/>
                 <a:cs typeface="Arial"/>
               </a:rPr>
-              <a:t xml:space="preserve">supplied article. The sequence is reused as</a:t>
-            </a:r>
-            <a:endParaRPr lang="en-US" sz="1500"/>
-          </a:p>
-          <a:p>
-            <a:pPr marL="0" indent="0">
-              <a:lnSpc>
-                <a:spcPts val="1950"/>
-              </a:lnSpc>
-              <a:spcAft>
-                <a:spcPts val="0"/>
-              </a:spcAft>
-              <a:buNone/>
-            </a:pPr>
-            <a:r>
-              <a:rPr lang="en-US" sz="1500" b="0">
-                <a:solidFill>
-                  <a:srgbClr val="202B33"/>
-                </a:solidFill>
-                <a:latin typeface="Arial"/>
-                <a:ea typeface="Arial"/>
-                <a:cs typeface="Arial"/>
-              </a:rPr>
-              <a:t xml:space="preserve">a teaching fixture, not a fresh</a:t>
-            </a:r>
-            <a:endParaRPr lang="en-US" sz="1500"/>
-          </a:p>
-          <a:p>
-            <a:pPr marL="0" indent="0">
-              <a:lnSpc>
-                <a:spcPts val="1950"/>
-              </a:lnSpc>
-              <a:spcAft>
-                <a:spcPts val="0"/>
-              </a:spcAft>
-              <a:buNone/>
-            </a:pPr>
-            <a:r>
-              <a:rPr lang="en-US" sz="1500" b="0">
-                <a:solidFill>
-                  <a:srgbClr val="202B33"/>
-                </a:solidFill>
-                <a:latin typeface="Arial"/>
-                <a:ea typeface="Arial"/>
-                <a:cs typeface="Arial"/>
-              </a:rPr>
-              <a:t xml:space="preserve">measurement.</a:t>
+              <a:t xml:space="preserve">danlevy.net, 11 August 2026. The sequence</a:t>
+            </a:r>
+            <a:endParaRPr lang="en-US" sz="1500"/>
+          </a:p>
+          <a:p>
+            <a:pPr marL="0" indent="0">
+              <a:lnSpc>
+                <a:spcPts val="1950"/>
+              </a:lnSpc>
+              <a:spcAft>
+                <a:spcPts val="0"/>
+              </a:spcAft>
+              <a:buNone/>
+            </a:pPr>
+            <a:r>
+              <a:rPr lang="en-US" sz="1500" b="0">
+                <a:solidFill>
+                  <a:srgbClr val="202B33"/>
+                </a:solidFill>
+                <a:latin typeface="Arial"/>
+                <a:ea typeface="Arial"/>
+                <a:cs typeface="Arial"/>
+              </a:rPr>
+              <a:t xml:space="preserve">is reused as a teaching fixture, not a</a:t>
+            </a:r>
+            <a:endParaRPr lang="en-US" sz="1500"/>
+          </a:p>
+          <a:p>
+            <a:pPr marL="0" indent="0">
+              <a:lnSpc>
+                <a:spcPts val="1950"/>
+              </a:lnSpc>
+              <a:spcAft>
+                <a:spcPts val="0"/>
+              </a:spcAft>
+              <a:buNone/>
+            </a:pPr>
+            <a:r>
+              <a:rPr lang="en-US" sz="1500" b="0">
+                <a:solidFill>
+                  <a:srgbClr val="202B33"/>
+                </a:solidFill>
+                <a:latin typeface="Arial"/>
+                <a:ea typeface="Arial"/>
+                <a:cs typeface="Arial"/>
+              </a:rPr>
+              <a:t xml:space="preserve">fresh measurement.</a:t>
             </a:r>
             <a:endParaRPr lang="en-US" sz="1500"/>
           </a:p>
@@ -15725,53 +15909,99 @@
                 <a:ea typeface="Arial"/>
                 <a:cs typeface="Arial"/>
               </a:rPr>
-              <a:t xml:space="preserve">[Position bias</a:t>
-            </a:r>
-            <a:endParaRPr lang="en-US" sz="1500"/>
-          </a:p>
-          <a:p>
-            <a:pPr marL="0" indent="0">
-              <a:lnSpc>
-                <a:spcPts val="1950"/>
-              </a:lnSpc>
-              <a:spcAft>
-                <a:spcPts val="0"/>
-              </a:spcAft>
-              <a:buNone/>
-            </a:pPr>
-            <a:r>
-              <a:rPr lang="en-US" sz="1500" b="0">
-                <a:solidFill>
-                  <a:srgbClr val="202B33"/>
-                </a:solidFill>
-                <a:latin typeface="Arial"/>
-                <a:ea typeface="Arial"/>
-                <a:cs typeface="Arial"/>
-              </a:rPr>
-              <a:t xml:space="preserve">study](https://arxiv.org/abs/2406.07791);</a:t>
-            </a:r>
-            <a:endParaRPr lang="en-US" sz="1500"/>
-          </a:p>
-          <a:p>
-            <a:pPr marL="0" indent="0">
-              <a:lnSpc>
-                <a:spcPts val="1950"/>
-              </a:lnSpc>
-              <a:spcAft>
-                <a:spcPts val="0"/>
-              </a:spcAft>
-              <a:buNone/>
-            </a:pPr>
-            <a:r>
-              <a:rPr lang="en-US" sz="1500" b="0">
-                <a:solidFill>
-                  <a:srgbClr val="202B33"/>
-                </a:solidFill>
-                <a:latin typeface="Arial"/>
-                <a:ea typeface="Arial"/>
-                <a:cs typeface="Arial"/>
-              </a:rPr>
-              <a:t xml:space="preserve">[Self-Preference Bias in</a:t>
+              <a:t xml:space="preserve">Shi et al. (2024), [Judging the Judges:</a:t>
+            </a:r>
+            <a:endParaRPr lang="en-US" sz="1500"/>
+          </a:p>
+          <a:p>
+            <a:pPr marL="0" indent="0">
+              <a:lnSpc>
+                <a:spcPts val="1950"/>
+              </a:lnSpc>
+              <a:spcAft>
+                <a:spcPts val="0"/>
+              </a:spcAft>
+              <a:buNone/>
+            </a:pPr>
+            <a:r>
+              <a:rPr lang="en-US" sz="1500" b="0">
+                <a:solidFill>
+                  <a:srgbClr val="202B33"/>
+                </a:solidFill>
+                <a:latin typeface="Arial"/>
+                <a:ea typeface="Arial"/>
+                <a:cs typeface="Arial"/>
+              </a:rPr>
+              <a:t xml:space="preserve">position bias in pairwise LLM</a:t>
+            </a:r>
+            <a:endParaRPr lang="en-US" sz="1500"/>
+          </a:p>
+          <a:p>
+            <a:pPr marL="0" indent="0">
+              <a:lnSpc>
+                <a:spcPts val="1950"/>
+              </a:lnSpc>
+              <a:spcAft>
+                <a:spcPts val="0"/>
+              </a:spcAft>
+              <a:buNone/>
+            </a:pPr>
+            <a:r>
+              <a:rPr lang="en-US" sz="1500" b="0">
+                <a:solidFill>
+                  <a:srgbClr val="202B33"/>
+                </a:solidFill>
+                <a:latin typeface="Arial"/>
+                <a:ea typeface="Arial"/>
+                <a:cs typeface="Arial"/>
+              </a:rPr>
+              <a:t xml:space="preserve">comparisons](https://arxiv.org/abs/2406.07791).</a:t>
+            </a:r>
+            <a:endParaRPr lang="en-US" sz="1500"/>
+          </a:p>
+          <a:p>
+            <a:pPr marL="0" indent="0">
+              <a:lnSpc>
+                <a:spcPts val="1950"/>
+              </a:lnSpc>
+              <a:spcAft>
+                <a:spcPts val="0"/>
+              </a:spcAft>
+              <a:buNone/>
+            </a:pPr>
+            <a:r>
+              <a:rPr lang="en-US" sz="1500" b="0">
+                <a:solidFill>
+                  <a:srgbClr val="202B33"/>
+                </a:solidFill>
+                <a:latin typeface="Arial"/>
+                <a:ea typeface="Arial"/>
+                <a:cs typeface="Arial"/>
+              </a:rPr>
+              <a:t xml:space="preserve">Wataoka et al. (2024), [Self-Preference</a:t>
+            </a:r>
+            <a:endParaRPr lang="en-US" sz="1500"/>
+          </a:p>
+          <a:p>
+            <a:pPr marL="0" indent="0">
+              <a:lnSpc>
+                <a:spcPts val="1950"/>
+              </a:lnSpc>
+              <a:spcAft>
+                <a:spcPts val="0"/>
+              </a:spcAft>
+              <a:buNone/>
+            </a:pPr>
+            <a:r>
+              <a:rPr lang="en-US" sz="1500" b="0">
+                <a:solidFill>
+                  <a:srgbClr val="202B33"/>
+                </a:solidFill>
+                <a:latin typeface="Arial"/>
+                <a:ea typeface="Arial"/>
+                <a:cs typeface="Arial"/>
+              </a:rPr>
+              <a:t xml:space="preserve">Bias in</a:t>
             </a:r>
             <a:endParaRPr lang="en-US" sz="1500"/>
           </a:p>
@@ -15841,29 +16071,6 @@
                 <a:cs typeface="Arial"/>
               </a:rPr>
               <a:t xml:space="preserve">Cleverdon, Mills, and Keen (1966),</a:t>
-            </a:r>
-            <a:endParaRPr lang="en-US" sz="1500"/>
-          </a:p>
-          <a:p>
-            <a:pPr marL="0" indent="0">
-              <a:lnSpc>
-                <a:spcPts val="1950"/>
-              </a:lnSpc>
-              <a:spcAft>
-                <a:spcPts val="0"/>
-              </a:spcAft>
-              <a:buNone/>
-            </a:pPr>
-            <a:r>
-              <a:rPr lang="en-US" sz="1500" b="0">
-                <a:solidFill>
-                  <a:srgbClr val="202B33"/>
-                </a:solidFill>
-                <a:latin typeface="Arial"/>
-                <a:ea typeface="Arial"/>
-                <a:cs typeface="Arial"/>
-              </a:rPr>
-              <a:t xml:space="preserve">Cranfield report front matter —</a:t>
             </a:r>
             <a:endParaRPr lang="en-US" sz="1500"/>
           </a:p>
@@ -15893,6 +16100,29 @@
             <a:noAutofit/>
           </a:bodyPr>
           <a:lstStyle/>
+          <a:p>
+            <a:pPr marL="0" indent="0">
+              <a:lnSpc>
+                <a:spcPts val="1950"/>
+              </a:lnSpc>
+              <a:spcAft>
+                <a:spcPts val="0"/>
+              </a:spcAft>
+              <a:buNone/>
+            </a:pPr>
+            <a:r>
+              <a:rPr lang="en-US" sz="1500" b="0">
+                <a:solidFill>
+                  <a:srgbClr val="202B33"/>
+                </a:solidFill>
+                <a:latin typeface="Arial"/>
+                <a:ea typeface="Arial"/>
+                <a:cs typeface="Arial"/>
+              </a:rPr>
+              <a:t xml:space="preserve">Cranfield report front matter —</a:t>
+            </a:r>
+            <a:endParaRPr lang="en-US" sz="1500"/>
+          </a:p>
           <a:p>
             <a:pPr marL="0" indent="0">
               <a:lnSpc>
@@ -16417,7 +16647,7 @@
                 <a:ea typeface="Arial"/>
                 <a:cs typeface="Arial"/>
               </a:rPr>
-              <a:t xml:space="preserve">A leaderboard, and the question it isn't answering</a:t>
+              <a:t xml:space="preserve">Tuxedo of Benchmarks</a:t>
             </a:r>
             <a:endParaRPr lang="en-US" sz="2550"/>
           </a:p>
@@ -17785,7 +18015,7 @@
                 <a:ea typeface="Arial"/>
                 <a:cs typeface="Arial"/>
               </a:rPr>
-              <a:t xml:space="preserve">arithmetic belongs to Cry Me a Free Tier.</a:t>
+              <a:t xml:space="preserve">arithmetic belongs to Buy Me a Free Tier.</a:t>
             </a:r>
             <a:endParaRPr lang="en-US" sz="1500"/>
           </a:p>
@@ -18962,7 +19192,7 @@
                 <a:ea typeface="Arial"/>
                 <a:cs typeface="Arial"/>
               </a:rPr>
-              <a:t xml:space="preserve">Your eval suite is a measuring instrument</a:t>
+              <a:t xml:space="preserve">Your Eval Suite Needs Therapy</a:t>
             </a:r>
             <a:endParaRPr lang="en-US" sz="2550"/>
           </a:p>
@@ -21530,7 +21760,7 @@
                 <a:ea typeface="Arial"/>
                 <a:cs typeface="Arial"/>
               </a:rPr>
-              <a:t xml:space="preserve">Run it five times</a:t>
+              <a:t xml:space="preserve">Run the Judges</a:t>
             </a:r>
             <a:endParaRPr lang="en-US" sz="2550"/>
           </a:p>
@@ -22455,7 +22685,7 @@
                 <a:ea typeface="Arial"/>
                 <a:cs typeface="Arial"/>
               </a:rPr>
-              <a:t xml:space="preserve">Twenty green cases. About one in seven.</a:t>
+              <a:t xml:space="preserve">Twenty for Twenty, One in Seven</a:t>
             </a:r>
             <a:endParaRPr lang="en-US" sz="2550"/>
           </a:p>
@@ -22485,7 +22715,7 @@
       </p:sp>
       <p:pic>
         <p:nvPicPr>
-          <p:cNvPr id="5" name="5d9d88671737e342604a8bb2f8a50f9753e84270f97998346745671bda4153b9" descr="Twenty green cases. About one in seven."/>
+          <p:cNvPr id="5" name="5d9d88671737e342604a8bb2f8a50f9753e84270f97998346745671bda4153b9" descr="Twenty for Twenty, One in Seven"/>
           <p:cNvPicPr>
             <a:picLocks noChangeAspect="1"/>
           </p:cNvPicPr>
